--- a/Quadro_Aulas_Report_2026-06-22.pptx
+++ b/Quadro_Aulas_Report_2026-06-22.pptx
@@ -1038,7 +1038,7 @@
                   <a:srgbClr val="8FA3C0"/>
                 </a:solidFill>
               </a:rPr>
-              <a:t>22 de Junho de 2026 as 09:48</a:t>
+              <a:t>22 de Junho de 2026 as 18:20</a:t>
             </a:r>
             <a:endParaRPr lang="en-US" sz="700" dirty="0"/>
           </a:p>
@@ -1135,7 +1135,7 @@
                   <a:srgbClr val="FFFFFF"/>
                 </a:solidFill>
               </a:rPr>
-              <a:t>396</a:t>
+              <a:t>398</a:t>
             </a:r>
             <a:endParaRPr lang="en-US" sz="2400" dirty="0"/>
           </a:p>
@@ -1207,7 +1207,7 @@
                   <a:srgbClr val="4ADE80"/>
                 </a:solidFill>
               </a:rPr>
-              <a:t>322</a:t>
+              <a:t>324</a:t>
             </a:r>
             <a:endParaRPr lang="en-US" sz="2400" dirty="0"/>
           </a:p>
@@ -1473,7 +1473,7 @@
                   <a:srgbClr val="8FA3C0"/>
                 </a:solidFill>
               </a:rPr>
-              <a:t>81% concluido  .  322 de 396 itens</a:t>
+              <a:t>81% concluido  .  324 de 398 itens</a:t>
             </a:r>
             <a:endParaRPr lang="en-US" sz="700" dirty="0"/>
           </a:p>
@@ -3767,7 +3767,7 @@
                   <a:srgbClr val="D97706"/>
                 </a:solidFill>
               </a:rPr>
-              <a:t>1270.4h</a:t>
+              <a:t>1274.4h</a:t>
             </a:r>
             <a:endParaRPr lang="en-US" sz="2400" dirty="0"/>
           </a:p>
@@ -4033,7 +4033,7 @@
                   <a:srgbClr val="D97706"/>
                 </a:solidFill>
               </a:rPr>
-              <a:t>+159.9h</a:t>
+              <a:t>+163.9h</a:t>
             </a:r>
             <a:endParaRPr lang="en-US" sz="2400" dirty="0"/>
           </a:p>
@@ -4069,7 +4069,7 @@
                   <a:srgbClr val="888888"/>
                 </a:solidFill>
               </a:rPr>
-              <a:t>projetado: 1412.9h (+13%)</a:t>
+              <a:t>projetado: 1416.9h (+13%)</a:t>
             </a:r>
             <a:endParaRPr lang="en-US" sz="700" dirty="0"/>
           </a:p>
@@ -4084,7 +4084,7 @@
         <p:spPr>
           <a:xfrm>
             <a:off x="2441448" y="2916936"/>
-            <a:ext cx="8673966" cy="54864"/>
+            <a:ext cx="8676713" cy="54864"/>
           </a:xfrm>
           <a:prstGeom prst="rect">
             <a:avLst/>
@@ -4108,8 +4108,8 @@
         </p:nvSpPr>
         <p:spPr>
           <a:xfrm>
-            <a:off x="11115414" y="2916936"/>
-            <a:ext cx="972954" cy="54864"/>
+            <a:off x="11118161" y="2916936"/>
+            <a:ext cx="970207" cy="54864"/>
           </a:xfrm>
           <a:prstGeom prst="rect">
             <a:avLst/>
@@ -6432,7 +6432,7 @@
                   <a:srgbClr val="FFFFFF"/>
                 </a:solidFill>
               </a:rPr>
-              <a:t>133</a:t>
+              <a:t>135</a:t>
             </a:r>
             <a:endParaRPr lang="en-US" sz="650" dirty="0"/>
           </a:p>
@@ -6482,7 +6482,7 @@
                   <a:srgbClr val="222222"/>
                 </a:solidFill>
               </a:rPr>
-              <a:t>133 itens criados pos 01/05</a:t>
+              <a:t>135 itens criados pos 01/05</a:t>
             </a:r>
             <a:endParaRPr lang="en-US" sz="750" dirty="0"/>
           </a:p>
@@ -6855,7 +6855,7 @@
                   <a:srgbClr val="D97706"/>
                 </a:solidFill>
               </a:rPr>
-              <a:t>222.2h · 41 subs finalizadas</a:t>
+              <a:t>224.2h · 42 subs finalizadas</a:t>
             </a:r>
             <a:endParaRPr lang="en-US" sz="950" dirty="0"/>
           </a:p>
@@ -7608,7 +7608,7 @@
                   <a:srgbClr val="D85A30"/>
                 </a:solidFill>
               </a:rPr>
-              <a:t>89.5h · 20 subs finalizadas</a:t>
+              <a:t>91.5h · 21 subs finalizadas</a:t>
             </a:r>
             <a:endParaRPr lang="en-US" sz="950" dirty="0"/>
           </a:p>
